--- a/PPTs/Chxx_Review.pptx
+++ b/PPTs/Chxx_Review.pptx
@@ -5043,7 +5043,7 @@
           <a:p>
             <a:r>
               <a:rPr lang="en-US" b="0" dirty="0"/>
-              <a:t>Fall 2025</a:t>
+              <a:t>Fall 2026</a:t>
             </a:r>
           </a:p>
         </p:txBody>
@@ -6206,21 +6206,58 @@
           <a:p>
             <a:r>
               <a:rPr lang="en-US" sz="1800" dirty="0"/>
-              <a:t>Determined by operating mode, and CONTROL[0]</a:t>
+              <a:t>Determined by operating mode and CONTROL[1]</a:t>
             </a:r>
           </a:p>
           <a:p>
             <a:pPr lvl="1"/>
             <a:r>
               <a:rPr lang="en-US" sz="1700" dirty="0"/>
-              <a:t>Thread mode </a:t>
+              <a:t xml:space="preserve">Thread mode </a:t>
             </a:r>
             <a:r>
               <a:rPr lang="en-US" sz="1700" dirty="0">
                 <a:latin typeface="Cambria Math"/>
                 <a:ea typeface="Cambria Math"/>
               </a:rPr>
-              <a:t>⟶ </a:t>
+              <a:t xml:space="preserve">⟶ </a:t>
+            </a:r>
+            <a:r>
+              <a:rPr lang="en-US" sz="1700" dirty="0" err="1">
+                <a:ea typeface="Cambria Math"/>
+              </a:rPr>
+              <a:t>SP = MSP if CONTROL[1] = 0; Otherwise SP = PSP</a:t>
+            </a:r>
+            <a:r>
+              <a:rPr lang="en-US" sz="1700" dirty="0">
+                <a:ea typeface="Cambria Math"/>
+              </a:rPr>
+              <a:t/>
+            </a:r>
+            <a:r>
+              <a:rPr lang="en-US" sz="1700" dirty="0" err="1">
+                <a:ea typeface="Cambria Math"/>
+              </a:rPr>
+              <a:t/>
+            </a:r>
+            <a:endParaRPr lang="en-US" sz="1700" dirty="0">
+              <a:ea typeface="Cambria Math"/>
+            </a:endParaRPr>
+          </a:p>
+          <a:p>
+            <a:pPr lvl="1"/>
+            <a:r>
+              <a:rPr lang="en-US" sz="1700" dirty="0">
+                <a:ea typeface="Cambria Math"/>
+              </a:rPr>
+              <a:t>Handler mode</a:t>
+            </a:r>
+            <a:r>
+              <a:rPr lang="en-US" sz="1700" dirty="0">
+                <a:latin typeface="Cambria Math"/>
+                <a:ea typeface="Cambria Math"/>
+              </a:rPr>
+              <a:t xml:space="preserve"> ⟶ </a:t>
             </a:r>
             <a:r>
               <a:rPr lang="en-US" sz="1700" dirty="0" err="1">
@@ -6232,44 +6269,7 @@
               <a:rPr lang="en-US" sz="1700" dirty="0">
                 <a:ea typeface="Cambria Math"/>
               </a:rPr>
-              <a:t> = </a:t>
-            </a:r>
-            <a:r>
-              <a:rPr lang="en-US" sz="1700" dirty="0" err="1">
-                <a:ea typeface="Cambria Math"/>
-              </a:rPr>
-              <a:t>PSP</a:t>
-            </a:r>
-            <a:endParaRPr lang="en-US" sz="1700" dirty="0">
-              <a:ea typeface="Cambria Math"/>
-            </a:endParaRPr>
-          </a:p>
-          <a:p>
-            <a:pPr lvl="1"/>
-            <a:r>
-              <a:rPr lang="en-US" sz="1700" dirty="0">
-                <a:ea typeface="Cambria Math"/>
-              </a:rPr>
-              <a:t>Handler mode</a:t>
-            </a:r>
-            <a:r>
-              <a:rPr lang="en-US" sz="1700" dirty="0">
-                <a:latin typeface="Cambria Math"/>
-                <a:ea typeface="Cambria Math"/>
-              </a:rPr>
-              <a:t> ⟶ </a:t>
-            </a:r>
-            <a:r>
-              <a:rPr lang="en-US" sz="1700" dirty="0" err="1">
-                <a:ea typeface="Cambria Math"/>
-              </a:rPr>
-              <a:t>SP</a:t>
-            </a:r>
-            <a:r>
-              <a:rPr lang="en-US" sz="1700" dirty="0">
-                <a:ea typeface="Cambria Math"/>
-              </a:rPr>
-              <a:t> = </a:t>
+              <a:t xml:space="preserve"> = </a:t>
             </a:r>
             <a:r>
               <a:rPr lang="en-US" sz="1700" dirty="0" err="1">
@@ -6281,25 +6281,25 @@
               <a:rPr lang="en-US" sz="1700" dirty="0">
                 <a:ea typeface="Cambria Math"/>
               </a:rPr>
-              <a:t>  if CONTROL[0] = 0; Otherwise </a:t>
+              <a:t/>
             </a:r>
             <a:r>
               <a:rPr lang="en-US" sz="1700" dirty="0" err="1">
                 <a:ea typeface="Cambria Math"/>
               </a:rPr>
-              <a:t>SP</a:t>
+              <a:t/>
             </a:r>
             <a:r>
               <a:rPr lang="en-US" sz="1700" dirty="0">
                 <a:ea typeface="Cambria Math"/>
               </a:rPr>
-              <a:t> = </a:t>
+              <a:t/>
             </a:r>
             <a:r>
               <a:rPr lang="en-US" sz="1700" dirty="0" err="1">
                 <a:ea typeface="Cambria Math"/>
               </a:rPr>
-              <a:t>PSP</a:t>
+              <a:t/>
             </a:r>
             <a:endParaRPr lang="en-US" sz="1700" dirty="0"/>
           </a:p>
@@ -6598,7 +6598,7 @@
                           <a:latin typeface="Consolas" panose="020B0609020204030204" pitchFamily="49" charset="0"/>
                           <a:cs typeface="Consolas" panose="020B0609020204030204" pitchFamily="49" charset="0"/>
                         </a:rPr>
-                        <a:t>xPSP</a:t>
+                        <a:t>xPSR</a:t>
                       </a:r>
                     </a:p>
                   </a:txBody>
@@ -7799,7 +7799,7 @@
             </a:pPr>
             <a:r>
               <a:rPr lang="en-US" dirty="0"/>
-              <a:t>The processor automatically pops these eight register out of the main stack when an interrupt hander exits.</a:t>
+              <a:t>The processor automatically pops these eight register out of the main stack when an interrupt handler exits.</a:t>
             </a:r>
           </a:p>
         </p:txBody>
@@ -9839,7 +9839,7 @@
                 <a:latin typeface="Consolas" panose="020B0609020204030204" pitchFamily="49" charset="0"/>
                 <a:cs typeface="Consolas" panose="020B0609020204030204" pitchFamily="49" charset="0"/>
               </a:rPr>
-              <a:t> r2, r3, r0, r1    ; Unsigned long multiply</a:t>
+              <a:t xml:space="preserve"> r2, r3, r0, r1    ; Signed long multiply</a:t>
             </a:r>
           </a:p>
           <a:p>
@@ -11158,7 +11158,7 @@
                             </a:solidFill>
                             <a:latin typeface="Cambria Math"/>
                           </a:rPr>
-                          <m:t>1000010</m:t>
+                          <m:t>10000010</m:t>
                         </m:r>
                       </m:e>
                       <m:sub>
@@ -12406,7 +12406,7 @@
                 <a:latin typeface="Arial" charset="0"/>
                 <a:cs typeface="Arial" charset="0"/>
               </a:rPr>
-              <a:t>CL_PSC</a:t>
+              <a:t>CK_PSC</a:t>
             </a:r>
             <a:endParaRPr lang="en-US" sz="1800" b="1" i="1" baseline="-25000" dirty="0">
               <a:solidFill>
@@ -14653,7 +14653,7 @@
                                 <a:rPr lang="en-US" sz="2400" i="1">
                                   <a:latin typeface="Cambria Math"/>
                                 </a:rPr>
-                                <m:t>𝐶𝐿</m:t>
+                                <m:t>𝐶𝐾</m:t>
                               </m:r>
                               <m:r>
                                 <a:rPr lang="en-US" sz="2400" i="1">
@@ -14922,7 +14922,7 @@
                 <a:latin typeface="Arial" charset="0"/>
                 <a:cs typeface="Arial" charset="0"/>
               </a:rPr>
-              <a:t>CL_CNT</a:t>
+              <a:t>CK_CNT</a:t>
             </a:r>
             <a:endParaRPr lang="en-US" sz="1800" b="1" i="1" baseline="-25000" dirty="0">
               <a:solidFill>
@@ -15685,7 +15685,7 @@
             </a:pPr>
             <a:r>
               <a:rPr lang="en-US" sz="1600" dirty="0"/>
-              <a:t>Help you understand how does the processor work</a:t>
+              <a:t>Help you understand how the processor works</a:t>
             </a:r>
           </a:p>
           <a:p>
@@ -15707,7 +15707,7 @@
             </a:pPr>
             <a:r>
               <a:rPr lang="en-US" sz="1600" dirty="0"/>
-              <a:t>Use the profiling tools to find the performance bottle and rewrite that code section in assembly</a:t>
+              <a:t>Use the profiling tools to find the performance bottleneck and rewrite that code section in assembly</a:t>
             </a:r>
           </a:p>
           <a:p>
@@ -15729,7 +15729,7 @@
             </a:pPr>
             <a:r>
               <a:rPr lang="en-US" sz="1600" dirty="0"/>
-              <a:t>Standard C compilers do not use some operations available on ARM processors, such ROR (Rotate Right) and RRX (Rotate Right Extended). </a:t>
+              <a:t xml:space="preserve">Standard C compilers do not use some operations available on ARM processors, such as ROR (Rotate Right) and RRX (Rotate Right Extended). </a:t>
             </a:r>
           </a:p>
           <a:p>
@@ -15795,7 +15795,7 @@
             </a:pPr>
             <a:r>
               <a:rPr lang="en-US" sz="1600" dirty="0"/>
-              <a:t>Embedded devices, where the size of code is limited, wash machine controller, automobile controllers</a:t>
+              <a:t>Embedded devices, where the size of code is limited, washing machine controllers, automobile controllers</a:t>
             </a:r>
           </a:p>
           <a:p>
@@ -19302,7 +19302,7 @@
             <a:pPr lvl="2"/>
             <a:r>
               <a:rPr lang="en-US" dirty="0"/>
-              <a:t>ADD r1, r0, r0, LSL 2</a:t>
+              <a:t>ADD r1, r0, r0, LSL #2</a:t>
             </a:r>
           </a:p>
           <a:p>
@@ -19350,7 +19350,7 @@
             <a:pPr lvl="1"/>
             <a:r>
               <a:rPr lang="en-US" dirty="0"/>
-              <a:t>Conditional Execution: MOVEQ, MOVNE</a:t>
+              <a:t>Conditional Execution: MOVEQ, MOVNE (needs an IT block on Cortex-M, e.g. ITE EQ)</a:t>
             </a:r>
           </a:p>
           <a:p>
@@ -19992,7 +19992,7 @@
             <a:pPr lvl="1"/>
             <a:r>
               <a:rPr lang="en-US" dirty="0"/>
-              <a:t>Eight registers (R0-R3, R12, LR, PC, PSR) are automatically pushed into the stack before the hander starts</a:t>
+              <a:t>Eight registers (R0-R3, R12, LR, PC, PSR) are automatically pushed into the stack before the handler starts</a:t>
             </a:r>
           </a:p>
           <a:p>
